--- a/slides/ch07-negative-messages.pptx
+++ b/slides/ch07-negative-messages.pptx
@@ -756,7 +756,7 @@
           <a:lstStyle/>
           <a:p>
             <a:r>
-              <a:t>Fifty-five years of replication. Chapter 1's upward filter, explained.</a:t>
+              <a:t>More than fifty years of replication. Chapter 1's upward filter, explained.</a:t>
             </a:r>
           </a:p>
         </p:txBody>

--- a/slides/ch07-negative-messages.pptx
+++ b/slides/ch07-negative-messages.pptx
@@ -6878,7 +6878,7 @@
                 </a:solidFill>
                 <a:latin typeface="Calibri"/>
               </a:rPr>
-              <a:t>BADM 225 · Chapter 7</a:t>
+              <a:t>BADM 225 · Chapter 7  ·  © Derek D. Bussan</a:t>
             </a:r>
           </a:p>
         </p:txBody>
@@ -7518,7 +7518,7 @@
                 </a:solidFill>
                 <a:latin typeface="Calibri"/>
               </a:rPr>
-              <a:t>BADM 225 · Chapter 7</a:t>
+              <a:t>BADM 225 · Chapter 7  ·  © Derek D. Bussan</a:t>
             </a:r>
           </a:p>
         </p:txBody>
@@ -7646,7 +7646,7 @@
                 </a:solidFill>
                 <a:latin typeface="Calibri"/>
               </a:rPr>
-              <a:t>BADM 225 · Chapter 7</a:t>
+              <a:t>BADM 225 · Chapter 7  ·  © Derek D. Bussan</a:t>
             </a:r>
           </a:p>
         </p:txBody>
@@ -7972,7 +7972,7 @@
                 </a:solidFill>
                 <a:latin typeface="Calibri"/>
               </a:rPr>
-              <a:t>BADM 225 · Chapter 7</a:t>
+              <a:t>BADM 225 · Chapter 7  ·  © Derek D. Bussan</a:t>
             </a:r>
           </a:p>
         </p:txBody>
@@ -8259,7 +8259,7 @@
                 </a:solidFill>
                 <a:latin typeface="Calibri"/>
               </a:rPr>
-              <a:t>BADM 225 · Chapter 7</a:t>
+              <a:t>BADM 225 · Chapter 7  ·  © Derek D. Bussan</a:t>
             </a:r>
           </a:p>
         </p:txBody>
@@ -8546,7 +8546,7 @@
                 </a:solidFill>
                 <a:latin typeface="Calibri"/>
               </a:rPr>
-              <a:t>BADM 225 · Chapter 7</a:t>
+              <a:t>BADM 225 · Chapter 7  ·  © Derek D. Bussan</a:t>
             </a:r>
           </a:p>
         </p:txBody>
@@ -8833,7 +8833,7 @@
                 </a:solidFill>
                 <a:latin typeface="Calibri"/>
               </a:rPr>
-              <a:t>BADM 225 · Chapter 7</a:t>
+              <a:t>BADM 225 · Chapter 7  ·  © Derek D. Bussan</a:t>
             </a:r>
           </a:p>
         </p:txBody>
@@ -9303,7 +9303,7 @@
                 </a:solidFill>
                 <a:latin typeface="Calibri"/>
               </a:rPr>
-              <a:t>BADM 225 · Chapter 7</a:t>
+              <a:t>BADM 225 · Chapter 7  ·  © Derek D. Bussan</a:t>
             </a:r>
           </a:p>
         </p:txBody>
@@ -9431,7 +9431,7 @@
                 </a:solidFill>
                 <a:latin typeface="Calibri"/>
               </a:rPr>
-              <a:t>BADM 225 · Chapter 7</a:t>
+              <a:t>BADM 225 · Chapter 7  ·  © Derek D. Bussan</a:t>
             </a:r>
           </a:p>
         </p:txBody>
@@ -9718,7 +9718,7 @@
                 </a:solidFill>
                 <a:latin typeface="Calibri"/>
               </a:rPr>
-              <a:t>BADM 225 · Chapter 7</a:t>
+              <a:t>BADM 225 · Chapter 7  ·  © Derek D. Bussan</a:t>
             </a:r>
           </a:p>
         </p:txBody>
@@ -10005,7 +10005,7 @@
                 </a:solidFill>
                 <a:latin typeface="Calibri"/>
               </a:rPr>
-              <a:t>BADM 225 · Chapter 7</a:t>
+              <a:t>BADM 225 · Chapter 7  ·  © Derek D. Bussan</a:t>
             </a:r>
           </a:p>
         </p:txBody>
@@ -10326,7 +10326,7 @@
                 </a:solidFill>
                 <a:latin typeface="Calibri"/>
               </a:rPr>
-              <a:t>BADM 225 · Chapter 7</a:t>
+              <a:t>BADM 225 · Chapter 7  ·  © Derek D. Bussan</a:t>
             </a:r>
           </a:p>
         </p:txBody>
@@ -10613,7 +10613,7 @@
                 </a:solidFill>
                 <a:latin typeface="Calibri"/>
               </a:rPr>
-              <a:t>BADM 225 · Chapter 7</a:t>
+              <a:t>BADM 225 · Chapter 7  ·  © Derek D. Bussan</a:t>
             </a:r>
           </a:p>
         </p:txBody>
@@ -10900,7 +10900,7 @@
                 </a:solidFill>
                 <a:latin typeface="Calibri"/>
               </a:rPr>
-              <a:t>BADM 225 · Chapter 7</a:t>
+              <a:t>BADM 225 · Chapter 7  ·  © Derek D. Bussan</a:t>
             </a:r>
           </a:p>
         </p:txBody>
@@ -11420,7 +11420,7 @@
                 </a:solidFill>
                 <a:latin typeface="Calibri"/>
               </a:rPr>
-              <a:t>BADM 225 · Chapter 7</a:t>
+              <a:t>BADM 225 · Chapter 7  ·  © Derek D. Bussan</a:t>
             </a:r>
           </a:p>
         </p:txBody>
@@ -11548,7 +11548,7 @@
                 </a:solidFill>
                 <a:latin typeface="Calibri"/>
               </a:rPr>
-              <a:t>BADM 225 · Chapter 7</a:t>
+              <a:t>BADM 225 · Chapter 7  ·  © Derek D. Bussan</a:t>
             </a:r>
           </a:p>
         </p:txBody>
@@ -12110,7 +12110,7 @@
                 </a:solidFill>
                 <a:latin typeface="Calibri"/>
               </a:rPr>
-              <a:t>BADM 225 · Chapter 7</a:t>
+              <a:t>BADM 225 · Chapter 7  ·  © Derek D. Bussan</a:t>
             </a:r>
           </a:p>
         </p:txBody>
@@ -12431,7 +12431,7 @@
                 </a:solidFill>
                 <a:latin typeface="Calibri"/>
               </a:rPr>
-              <a:t>BADM 225 · Chapter 7</a:t>
+              <a:t>BADM 225 · Chapter 7  ·  © Derek D. Bussan</a:t>
             </a:r>
           </a:p>
         </p:txBody>
@@ -12884,7 +12884,7 @@
                 </a:solidFill>
                 <a:latin typeface="Calibri"/>
               </a:rPr>
-              <a:t>BADM 225 · Chapter 7</a:t>
+              <a:t>BADM 225 · Chapter 7  ·  © Derek D. Bussan</a:t>
             </a:r>
           </a:p>
         </p:txBody>
@@ -13249,7 +13249,7 @@
                 </a:solidFill>
                 <a:latin typeface="Calibri"/>
               </a:rPr>
-              <a:t>BADM 225 · Chapter 7</a:t>
+              <a:t>BADM 225 · Chapter 7  ·  © Derek D. Bussan</a:t>
             </a:r>
           </a:p>
         </p:txBody>
@@ -13377,7 +13377,7 @@
                 </a:solidFill>
                 <a:latin typeface="Calibri"/>
               </a:rPr>
-              <a:t>BADM 225 · Chapter 7</a:t>
+              <a:t>BADM 225 · Chapter 7  ·  © Derek D. Bussan</a:t>
             </a:r>
           </a:p>
         </p:txBody>
@@ -13742,7 +13742,7 @@
                 </a:solidFill>
                 <a:latin typeface="Calibri"/>
               </a:rPr>
-              <a:t>BADM 225 · Chapter 7</a:t>
+              <a:t>BADM 225 · Chapter 7  ·  © Derek D. Bussan</a:t>
             </a:r>
           </a:p>
         </p:txBody>
@@ -13870,7 +13870,7 @@
                 </a:solidFill>
                 <a:latin typeface="Calibri"/>
               </a:rPr>
-              <a:t>BADM 225 · Chapter 7</a:t>
+              <a:t>BADM 225 · Chapter 7  ·  © Derek D. Bussan</a:t>
             </a:r>
           </a:p>
         </p:txBody>
@@ -14432,7 +14432,7 @@
                 </a:solidFill>
                 <a:latin typeface="Calibri"/>
               </a:rPr>
-              <a:t>BADM 225 · Chapter 7</a:t>
+              <a:t>BADM 225 · Chapter 7  ·  © Derek D. Bussan</a:t>
             </a:r>
           </a:p>
         </p:txBody>
@@ -14719,7 +14719,7 @@
                 </a:solidFill>
                 <a:latin typeface="Calibri"/>
               </a:rPr>
-              <a:t>BADM 225 · Chapter 7</a:t>
+              <a:t>BADM 225 · Chapter 7  ·  © Derek D. Bussan</a:t>
             </a:r>
           </a:p>
         </p:txBody>
@@ -15084,7 +15084,7 @@
                 </a:solidFill>
                 <a:latin typeface="Calibri"/>
               </a:rPr>
-              <a:t>BADM 225 · Chapter 7</a:t>
+              <a:t>BADM 225 · Chapter 7  ·  © Derek D. Bussan</a:t>
             </a:r>
           </a:p>
         </p:txBody>
@@ -15212,7 +15212,7 @@
                 </a:solidFill>
                 <a:latin typeface="Calibri"/>
               </a:rPr>
-              <a:t>BADM 225 · Chapter 7</a:t>
+              <a:t>BADM 225 · Chapter 7  ·  © Derek D. Bussan</a:t>
             </a:r>
           </a:p>
         </p:txBody>
@@ -15866,7 +15866,7 @@
                 </a:solidFill>
                 <a:latin typeface="Calibri"/>
               </a:rPr>
-              <a:t>BADM 225 · Chapter 7</a:t>
+              <a:t>BADM 225 · Chapter 7  ·  © Derek D. Bussan</a:t>
             </a:r>
           </a:p>
         </p:txBody>
@@ -16153,7 +16153,7 @@
                 </a:solidFill>
                 <a:latin typeface="Calibri"/>
               </a:rPr>
-              <a:t>BADM 225 · Chapter 7</a:t>
+              <a:t>BADM 225 · Chapter 7  ·  © Derek D. Bussan</a:t>
             </a:r>
           </a:p>
         </p:txBody>
@@ -16595,7 +16595,7 @@
                 </a:solidFill>
                 <a:latin typeface="Calibri"/>
               </a:rPr>
-              <a:t>BADM 225 · Chapter 7</a:t>
+              <a:t>BADM 225 · Chapter 7  ·  © Derek D. Bussan</a:t>
             </a:r>
           </a:p>
         </p:txBody>
@@ -16960,7 +16960,7 @@
                 </a:solidFill>
                 <a:latin typeface="Calibri"/>
               </a:rPr>
-              <a:t>BADM 225 · Chapter 7</a:t>
+              <a:t>BADM 225 · Chapter 7  ·  © Derek D. Bussan</a:t>
             </a:r>
           </a:p>
         </p:txBody>
@@ -17088,7 +17088,7 @@
                 </a:solidFill>
                 <a:latin typeface="Calibri"/>
               </a:rPr>
-              <a:t>BADM 225 · Chapter 7</a:t>
+              <a:t>BADM 225 · Chapter 7  ·  © Derek D. Bussan</a:t>
             </a:r>
           </a:p>
         </p:txBody>
@@ -17375,7 +17375,7 @@
                 </a:solidFill>
                 <a:latin typeface="Calibri"/>
               </a:rPr>
-              <a:t>BADM 225 · Chapter 7</a:t>
+              <a:t>BADM 225 · Chapter 7  ·  © Derek D. Bussan</a:t>
             </a:r>
           </a:p>
         </p:txBody>
@@ -17937,7 +17937,7 @@
                 </a:solidFill>
                 <a:latin typeface="Calibri"/>
               </a:rPr>
-              <a:t>BADM 225 · Chapter 7</a:t>
+              <a:t>BADM 225 · Chapter 7  ·  © Derek D. Bussan</a:t>
             </a:r>
           </a:p>
         </p:txBody>
@@ -18224,7 +18224,7 @@
                 </a:solidFill>
                 <a:latin typeface="Calibri"/>
               </a:rPr>
-              <a:t>BADM 225 · Chapter 7</a:t>
+              <a:t>BADM 225 · Chapter 7  ·  © Derek D. Bussan</a:t>
             </a:r>
           </a:p>
         </p:txBody>
@@ -18511,7 +18511,7 @@
                 </a:solidFill>
                 <a:latin typeface="Calibri"/>
               </a:rPr>
-              <a:t>BADM 225 · Chapter 7</a:t>
+              <a:t>BADM 225 · Chapter 7  ·  © Derek D. Bussan</a:t>
             </a:r>
           </a:p>
         </p:txBody>
@@ -19326,7 +19326,7 @@
                 </a:solidFill>
                 <a:latin typeface="Calibri"/>
               </a:rPr>
-              <a:t>BADM 225 · Chapter 7</a:t>
+              <a:t>BADM 225 · Chapter 7  ·  © Derek D. Bussan</a:t>
             </a:r>
           </a:p>
         </p:txBody>
@@ -19602,7 +19602,7 @@
                 </a:solidFill>
                 <a:latin typeface="Calibri"/>
               </a:rPr>
-              <a:t>BADM 225 · Chapter 7</a:t>
+              <a:t>BADM 225 · Chapter 7  ·  © Derek D. Bussan</a:t>
             </a:r>
           </a:p>
         </p:txBody>
@@ -19695,7 +19695,7 @@
                 </a:solidFill>
                 <a:latin typeface="Calibri"/>
               </a:rPr>
-              <a:t>BADM 225 · Chapter 7</a:t>
+              <a:t>BADM 225 · Chapter 7  ·  © Derek D. Bussan</a:t>
             </a:r>
           </a:p>
         </p:txBody>
@@ -20016,7 +20016,7 @@
                 </a:solidFill>
                 <a:latin typeface="Calibri"/>
               </a:rPr>
-              <a:t>BADM 225 · Chapter 7</a:t>
+              <a:t>BADM 225 · Chapter 7  ·  © Derek D. Bussan</a:t>
             </a:r>
           </a:p>
         </p:txBody>
@@ -20442,7 +20442,7 @@
                 </a:solidFill>
                 <a:latin typeface="Calibri"/>
               </a:rPr>
-              <a:t>BADM 225 · Chapter 7</a:t>
+              <a:t>BADM 225 · Chapter 7  ·  © Derek D. Bussan</a:t>
             </a:r>
           </a:p>
         </p:txBody>
@@ -20695,7 +20695,7 @@
                 </a:solidFill>
                 <a:latin typeface="Calibri"/>
               </a:rPr>
-              <a:t>BADM 225 · Chapter 7</a:t>
+              <a:t>BADM 225 · Chapter 7  ·  © Derek D. Bussan</a:t>
             </a:r>
           </a:p>
         </p:txBody>
@@ -21148,7 +21148,7 @@
                 </a:solidFill>
                 <a:latin typeface="Calibri"/>
               </a:rPr>
-              <a:t>BADM 225 · Chapter 7</a:t>
+              <a:t>BADM 225 · Chapter 7  ·  © Derek D. Bussan</a:t>
             </a:r>
           </a:p>
         </p:txBody>
@@ -21825,7 +21825,7 @@
                 </a:solidFill>
                 <a:latin typeface="Calibri"/>
               </a:rPr>
-              <a:t>BADM 225 · Chapter 7</a:t>
+              <a:t>BADM 225 · Chapter 7  ·  © Derek D. Bussan</a:t>
             </a:r>
           </a:p>
         </p:txBody>

--- a/slides/ch07-negative-messages.pptx
+++ b/slides/ch07-negative-messages.pptx
@@ -6785,7 +6785,7 @@
                 </a:solidFill>
                 <a:latin typeface="Calibri"/>
               </a:rPr>
-              <a:t>BADM 225 · Chapter 7  ·  Original instructional material — no publisher content</a:t>
+              <a:t>BADM 225 · Chapter 7  ·  Original material © 2026 Derek D. Bussan, PhD, MBA  ·  No publisher content</a:t>
             </a:r>
           </a:p>
         </p:txBody>
